--- a/dist/초3/국어/읽기와어휘/초3_국어_읽기와어휘_03_국어사전찾기_학생용.pptx
+++ b/dist/초3/국어/읽기와어휘/초3_국어_읽기와어휘_03_국어사전찾기_학생용.pptx
@@ -118,13 +118,13 @@
   <p:extLst>
     <p:ext uri="{521415D9-36F7-43E2-AB2F-B90AF26B5E84}">
       <p14:sectionLst xmlns:p14="http://schemas.microsoft.com/office/powerpoint/2010/main">
-        <p14:section name="도입" id="{e857d5c0-7e0e-135e-4f10-28265bdded70}">
+        <p14:section name="도입" id="{21347399-d040-8d2d-c548-7add2285ec11}">
           <p14:sldIdLst>
             <p14:sldId id="256"/>
             <p14:sldId id="257"/>
           </p14:sldIdLst>
         </p14:section>
-        <p14:section name="개념" id="{fd8ba772-a80c-65b5-07fe-fb2d6aa5a256}">
+        <p14:section name="개념" id="{965e5fb1-b821-22b7-41a8-d5d5ea3995c5}">
           <p14:sldIdLst>
             <p14:sldId id="258"/>
             <p14:sldId id="259"/>
@@ -132,30 +132,30 @@
             <p14:sldId id="262"/>
           </p14:sldIdLst>
         </p14:section>
-        <p14:section name="연습" id="{8d48766b-44f2-f2d7-418c-b16aa03105bb}">
+        <p14:section name="연습" id="{2f6a9d45-3fda-251c-0cce-39a56670e1db}">
           <p14:sldIdLst>
             <p14:sldId id="260"/>
             <p14:sldId id="263"/>
           </p14:sldIdLst>
         </p14:section>
-        <p14:section name="개념" id="{a9a6cded-2c6a-73ef-fe89-6c3ca7f47030}">
+        <p14:section name="개념" id="{82fd2251-ca0c-d208-31df-4a6af8a539e8}">
           <p14:sldIdLst/>
         </p14:section>
-        <p14:section name="연습" id="{667ef90f-4bdc-a496-1aef-b947c82c8de5}">
+        <p14:section name="연습" id="{a28f8a13-1493-666c-1459-3df3539b0421}">
           <p14:sldIdLst/>
         </p14:section>
-        <p14:section name="확인" id="{d2f8f282-becd-9cbc-391b-bfd1f2c6772b}">
+        <p14:section name="확인" id="{a0525a15-2e01-485c-8fa3-07f154859568}">
           <p14:sldIdLst>
             <p14:sldId id="264"/>
             <p14:sldId id="265"/>
           </p14:sldIdLst>
         </p14:section>
-        <p14:section name="정리" id="{ba687617-fb3b-daa8-54b5-f3a7c48f2c18}">
+        <p14:section name="정리" id="{7b0b123b-0244-e19a-4055-10cb4eecd880}">
           <p14:sldIdLst>
             <p14:sldId id="266"/>
           </p14:sldIdLst>
         </p14:section>
-        <p14:section name="보충" id="{7c9f96f3-7231-17d2-2f36-8bc90a37155f}">
+        <p14:section name="보충" id="{f3b20a71-422e-d66f-101e-cf6ffe6daed7}">
           <p14:sldIdLst>
             <p14:sldId id="267"/>
           </p14:sldIdLst>
@@ -2611,7 +2611,7 @@
           <a:bodyPr wrap="square" lIns="0" tIns="0" rIns="0" bIns="0" rtlCol="0" anchor="ctr"/>
           <a:lstStyle/>
           <a:p>
-            <a:pPr algn="l" indent="0" marL="0">
+            <a:pPr eaLnBrk="0" algn="l" indent="0" marL="0">
               <a:buNone/>
             </a:pPr>
             <a:r>
@@ -2652,7 +2652,7 @@
           <a:bodyPr wrap="square" lIns="0" tIns="0" rIns="0" bIns="0" rtlCol="0" anchor="t"/>
           <a:lstStyle/>
           <a:p>
-            <a:pPr indent="0" marL="0">
+            <a:pPr eaLnBrk="0" indent="0" marL="0">
               <a:buNone/>
             </a:pPr>
             <a:r>
@@ -2718,7 +2718,7 @@
           <a:bodyPr wrap="square" lIns="0" tIns="0" rIns="0" bIns="0" rtlCol="0" anchor="ctr"/>
           <a:lstStyle/>
           <a:p>
-            <a:pPr indent="0" marL="0">
+            <a:pPr eaLnBrk="0" indent="0" marL="0">
               <a:spcAft>
                 <a:spcPts val="600"/>
               </a:spcAft>
@@ -2738,7 +2738,7 @@
             <a:endParaRPr lang="ko-KR" sz="3000" dirty="0"/>
           </a:p>
           <a:p>
-            <a:pPr indent="0" marL="0">
+            <a:pPr eaLnBrk="0" indent="0" marL="0">
               <a:spcAft>
                 <a:spcPts val="600"/>
               </a:spcAft>
@@ -2758,7 +2758,7 @@
             <a:endParaRPr lang="ko-KR" sz="3000" dirty="0"/>
           </a:p>
           <a:p>
-            <a:pPr indent="0" marL="0">
+            <a:pPr eaLnBrk="0" indent="0" marL="0">
               <a:spcAft>
                 <a:spcPts val="600"/>
               </a:spcAft>
@@ -2827,7 +2827,7 @@
           <a:bodyPr wrap="square" lIns="0" tIns="0" rIns="0" bIns="0" rtlCol="0" anchor="ctr"/>
           <a:lstStyle/>
           <a:p>
-            <a:pPr algn="l" indent="0" marL="0">
+            <a:pPr eaLnBrk="0" algn="l" indent="0" marL="0">
               <a:buNone/>
             </a:pPr>
             <a:r>
@@ -2893,7 +2893,7 @@
           <a:bodyPr wrap="square" lIns="0" tIns="0" rIns="0" bIns="0" rtlCol="0" anchor="ctr"/>
           <a:lstStyle/>
           <a:p>
-            <a:pPr indent="0" marL="0">
+            <a:pPr eaLnBrk="0" indent="0" marL="0">
               <a:spcAft>
                 <a:spcPts val="600"/>
               </a:spcAft>
@@ -2943,7 +2943,7 @@
           <a:bodyPr wrap="square" lIns="0" tIns="0" rIns="0" bIns="0" rtlCol="0" anchor="ctr"/>
           <a:lstStyle/>
           <a:p>
-            <a:pPr algn="ctr" indent="0" marL="0">
+            <a:pPr eaLnBrk="0" algn="ctr" indent="0" marL="0">
               <a:buNone/>
             </a:pPr>
             <a:r>
@@ -3009,7 +3009,7 @@
           <a:bodyPr wrap="square" lIns="0" tIns="0" rIns="0" bIns="0" rtlCol="0" anchor="ctr"/>
           <a:lstStyle/>
           <a:p>
-            <a:pPr indent="0" marL="0">
+            <a:pPr eaLnBrk="0" indent="0" marL="0">
               <a:spcAft>
                 <a:spcPts val="600"/>
               </a:spcAft>
@@ -3059,7 +3059,7 @@
           <a:bodyPr wrap="square" lIns="0" tIns="0" rIns="0" bIns="0" rtlCol="0" anchor="ctr"/>
           <a:lstStyle/>
           <a:p>
-            <a:pPr algn="ctr" indent="0" marL="0">
+            <a:pPr eaLnBrk="0" algn="ctr" indent="0" marL="0">
               <a:buNone/>
             </a:pPr>
             <a:r>
@@ -3125,7 +3125,7 @@
           <a:bodyPr wrap="square" lIns="0" tIns="0" rIns="0" bIns="0" rtlCol="0" anchor="ctr"/>
           <a:lstStyle/>
           <a:p>
-            <a:pPr indent="0" marL="0">
+            <a:pPr eaLnBrk="0" indent="0" marL="0">
               <a:spcAft>
                 <a:spcPts val="600"/>
               </a:spcAft>
@@ -3175,7 +3175,7 @@
           <a:bodyPr wrap="square" lIns="0" tIns="0" rIns="0" bIns="0" rtlCol="0" anchor="ctr"/>
           <a:lstStyle/>
           <a:p>
-            <a:pPr algn="ctr" indent="0" marL="0">
+            <a:pPr eaLnBrk="0" algn="ctr" indent="0" marL="0">
               <a:buNone/>
             </a:pPr>
             <a:r>
@@ -3241,7 +3241,7 @@
           <a:bodyPr wrap="square" lIns="0" tIns="0" rIns="0" bIns="0" rtlCol="0" anchor="ctr"/>
           <a:lstStyle/>
           <a:p>
-            <a:pPr indent="0" marL="0">
+            <a:pPr eaLnBrk="0" indent="0" marL="0">
               <a:spcAft>
                 <a:spcPts val="600"/>
               </a:spcAft>
@@ -3301,7 +3301,7 @@
             </a:lvl1pPr>
           </a:lstStyle>
           <a:p>
-            <a:pPr algn="r"/>
+            <a:pPr eaLnBrk="0" algn="r"/>
             <a:fld id="{F7021451-1387-4CA6-816F-3879F97B5CBC}" type="slidenum">
               <a:rPr b="0" lang="en-US"/>
               <a:t>10</a:t>
@@ -3358,7 +3358,7 @@
           <a:bodyPr wrap="square" lIns="0" tIns="0" rIns="0" bIns="0" rtlCol="0" anchor="ctr"/>
           <a:lstStyle/>
           <a:p>
-            <a:pPr algn="l" indent="0" marL="0">
+            <a:pPr eaLnBrk="0" algn="l" indent="0" marL="0">
               <a:buNone/>
             </a:pPr>
             <a:r>
@@ -3424,7 +3424,7 @@
           <a:bodyPr wrap="square" lIns="0" tIns="0" rIns="0" bIns="0" rtlCol="0" anchor="ctr"/>
           <a:lstStyle/>
           <a:p>
-            <a:pPr indent="0" marL="0">
+            <a:pPr eaLnBrk="0" indent="0" marL="0">
               <a:spcAft>
                 <a:spcPts val="600"/>
               </a:spcAft>
@@ -3444,7 +3444,7 @@
             <a:endParaRPr lang="ko-KR" sz="3000" dirty="0"/>
           </a:p>
           <a:p>
-            <a:pPr indent="0" marL="0">
+            <a:pPr eaLnBrk="0" indent="0" marL="0">
               <a:spcAft>
                 <a:spcPts val="600"/>
               </a:spcAft>
@@ -3494,7 +3494,7 @@
           <a:bodyPr wrap="square" lIns="177800" tIns="0" rIns="177800" bIns="0" rtlCol="0" anchor="ctr"/>
           <a:lstStyle/>
           <a:p>
-            <a:pPr algn="l" indent="0" marL="0">
+            <a:pPr eaLnBrk="0" algn="l" indent="0" marL="0">
               <a:buNone/>
             </a:pPr>
             <a:r>
@@ -3541,7 +3541,7 @@
           <a:bodyPr wrap="square" lIns="177800" tIns="0" rIns="177800" bIns="0" rtlCol="0" anchor="ctr"/>
           <a:lstStyle/>
           <a:p>
-            <a:pPr algn="l" indent="0" marL="0">
+            <a:pPr eaLnBrk="0" algn="l" indent="0" marL="0">
               <a:buNone/>
             </a:pPr>
             <a:r>
@@ -3580,7 +3580,7 @@
           <a:bodyPr wrap="square" lIns="0" tIns="0" rIns="0" bIns="0" rtlCol="0" anchor="t"/>
           <a:lstStyle/>
           <a:p>
-            <a:pPr algn="l" indent="0" marL="0">
+            <a:pPr eaLnBrk="0" algn="l" indent="0" marL="0">
               <a:buNone/>
             </a:pPr>
             <a:r>
@@ -3619,7 +3619,7 @@
           <a:bodyPr wrap="square" lIns="0" tIns="0" rIns="0" bIns="0" rtlCol="0" anchor="ctr"/>
           <a:lstStyle/>
           <a:p>
-            <a:pPr algn="l" indent="0" marL="0">
+            <a:pPr eaLnBrk="0" algn="l" indent="0" marL="0">
               <a:buNone/>
             </a:pPr>
             <a:r>
@@ -3658,7 +3658,7 @@
           <a:bodyPr wrap="square" lIns="0" tIns="0" rIns="0" bIns="0" rtlCol="0" anchor="ctr"/>
           <a:lstStyle/>
           <a:p>
-            <a:pPr algn="l" indent="0" marL="0">
+            <a:pPr eaLnBrk="0" algn="l" indent="0" marL="0">
               <a:buNone/>
             </a:pPr>
             <a:r>
@@ -3697,7 +3697,7 @@
           <a:bodyPr wrap="square" lIns="0" tIns="0" rIns="0" bIns="0" rtlCol="0" anchor="ctr"/>
           <a:lstStyle/>
           <a:p>
-            <a:pPr algn="l" indent="0" marL="0">
+            <a:pPr eaLnBrk="0" algn="l" indent="0" marL="0">
               <a:buNone/>
             </a:pPr>
             <a:r>
@@ -3736,7 +3736,7 @@
           <a:bodyPr wrap="square" lIns="0" tIns="0" rIns="0" bIns="0" rtlCol="0" anchor="ctr"/>
           <a:lstStyle/>
           <a:p>
-            <a:pPr algn="l" indent="0" marL="0">
+            <a:pPr eaLnBrk="0" algn="l" indent="0" marL="0">
               <a:buNone/>
             </a:pPr>
             <a:r>
@@ -3793,7 +3793,7 @@
             </a:lvl1pPr>
           </a:lstStyle>
           <a:p>
-            <a:pPr algn="r"/>
+            <a:pPr eaLnBrk="0" algn="r"/>
             <a:fld id="{F7021451-1387-4CA6-816F-3879F97B5CBC}" type="slidenum">
               <a:rPr b="0" lang="en-US"/>
               <a:t>11</a:t>
@@ -3850,7 +3850,7 @@
           <a:bodyPr wrap="square" lIns="0" tIns="0" rIns="0" bIns="0" rtlCol="0" anchor="ctr"/>
           <a:lstStyle/>
           <a:p>
-            <a:pPr algn="l" indent="0" marL="0">
+            <a:pPr eaLnBrk="0" algn="l" indent="0" marL="0">
               <a:buNone/>
             </a:pPr>
             <a:r>
@@ -3889,7 +3889,7 @@
           <a:bodyPr wrap="square" lIns="0" tIns="0" rIns="0" bIns="0" rtlCol="0" anchor="ctr"/>
           <a:lstStyle/>
           <a:p>
-            <a:pPr algn="l" indent="0" marL="0">
+            <a:pPr eaLnBrk="0" algn="l" indent="0" marL="0">
               <a:buNone/>
             </a:pPr>
             <a:r>
@@ -3955,7 +3955,7 @@
           <a:bodyPr wrap="square" lIns="0" tIns="0" rIns="0" bIns="0" rtlCol="0" anchor="ctr"/>
           <a:lstStyle/>
           <a:p>
-            <a:pPr indent="0" marL="0">
+            <a:pPr eaLnBrk="0" indent="0" marL="0">
               <a:spcAft>
                 <a:spcPts val="600"/>
               </a:spcAft>
@@ -4005,7 +4005,7 @@
           <a:bodyPr wrap="square" lIns="0" tIns="0" rIns="0" bIns="0" rtlCol="0" anchor="ctr"/>
           <a:lstStyle/>
           <a:p>
-            <a:pPr algn="ctr" indent="0" marL="0">
+            <a:pPr eaLnBrk="0" algn="ctr" indent="0" marL="0">
               <a:buNone/>
             </a:pPr>
             <a:r>
@@ -4044,7 +4044,7 @@
           <a:bodyPr wrap="square" lIns="0" tIns="0" rIns="0" bIns="0" rtlCol="0" anchor="ctr"/>
           <a:lstStyle/>
           <a:p>
-            <a:pPr algn="ctr" indent="0" marL="0">
+            <a:pPr eaLnBrk="0" algn="ctr" indent="0" marL="0">
               <a:buNone/>
             </a:pPr>
             <a:r>
@@ -4091,7 +4091,7 @@
           <a:bodyPr wrap="square" lIns="0" tIns="0" rIns="0" bIns="0" rtlCol="0" anchor="ctr"/>
           <a:lstStyle/>
           <a:p>
-            <a:pPr algn="ctr" indent="0" marL="0">
+            <a:pPr eaLnBrk="0" algn="ctr" indent="0" marL="0">
               <a:buNone/>
             </a:pPr>
             <a:r>
@@ -4130,7 +4130,7 @@
           <a:bodyPr wrap="square" lIns="0" tIns="0" rIns="0" bIns="0" rtlCol="0" anchor="ctr"/>
           <a:lstStyle/>
           <a:p>
-            <a:pPr algn="ctr" indent="0" marL="0">
+            <a:pPr eaLnBrk="0" algn="ctr" indent="0" marL="0">
               <a:buNone/>
             </a:pPr>
             <a:r>
@@ -4177,7 +4177,7 @@
           <a:bodyPr wrap="square" lIns="0" tIns="0" rIns="0" bIns="0" rtlCol="0" anchor="ctr"/>
           <a:lstStyle/>
           <a:p>
-            <a:pPr algn="ctr" indent="0" marL="0">
+            <a:pPr eaLnBrk="0" algn="ctr" indent="0" marL="0">
               <a:buNone/>
             </a:pPr>
             <a:r>
@@ -4216,7 +4216,7 @@
           <a:bodyPr wrap="square" lIns="0" tIns="0" rIns="0" bIns="0" rtlCol="0" anchor="ctr"/>
           <a:lstStyle/>
           <a:p>
-            <a:pPr algn="ctr" indent="0" marL="0">
+            <a:pPr eaLnBrk="0" algn="ctr" indent="0" marL="0">
               <a:buNone/>
             </a:pPr>
             <a:r>
@@ -4263,7 +4263,7 @@
           <a:bodyPr wrap="square" lIns="0" tIns="0" rIns="0" bIns="0" rtlCol="0" anchor="ctr"/>
           <a:lstStyle/>
           <a:p>
-            <a:pPr algn="ctr" indent="0" marL="0">
+            <a:pPr eaLnBrk="0" algn="ctr" indent="0" marL="0">
               <a:buNone/>
             </a:pPr>
             <a:r>
@@ -4302,7 +4302,7 @@
           <a:bodyPr wrap="square" lIns="0" tIns="0" rIns="0" bIns="0" rtlCol="0" anchor="ctr"/>
           <a:lstStyle/>
           <a:p>
-            <a:pPr algn="ctr" indent="0" marL="0">
+            <a:pPr eaLnBrk="0" algn="ctr" indent="0" marL="0">
               <a:buNone/>
             </a:pPr>
             <a:r>
@@ -4349,7 +4349,7 @@
           <a:bodyPr wrap="square" lIns="0" tIns="0" rIns="0" bIns="0" rtlCol="0" anchor="ctr"/>
           <a:lstStyle/>
           <a:p>
-            <a:pPr algn="ctr" indent="0" marL="0">
+            <a:pPr eaLnBrk="0" algn="ctr" indent="0" marL="0">
               <a:buNone/>
             </a:pPr>
             <a:r>
@@ -4388,7 +4388,7 @@
           <a:bodyPr wrap="square" lIns="0" tIns="0" rIns="0" bIns="0" rtlCol="0" anchor="ctr"/>
           <a:lstStyle/>
           <a:p>
-            <a:pPr algn="ctr" indent="0" marL="0">
+            <a:pPr eaLnBrk="0" algn="ctr" indent="0" marL="0">
               <a:buNone/>
             </a:pPr>
             <a:r>
@@ -4435,7 +4435,7 @@
           <a:bodyPr wrap="square" lIns="0" tIns="0" rIns="0" bIns="0" rtlCol="0" anchor="ctr"/>
           <a:lstStyle/>
           <a:p>
-            <a:pPr algn="ctr" indent="0" marL="0">
+            <a:pPr eaLnBrk="0" algn="ctr" indent="0" marL="0">
               <a:buNone/>
             </a:pPr>
             <a:r>
@@ -4474,7 +4474,7 @@
           <a:bodyPr wrap="square" lIns="0" tIns="0" rIns="0" bIns="0" rtlCol="0" anchor="ctr"/>
           <a:lstStyle/>
           <a:p>
-            <a:pPr algn="ctr" indent="0" marL="0">
+            <a:pPr eaLnBrk="0" algn="ctr" indent="0" marL="0">
               <a:buNone/>
             </a:pPr>
             <a:r>
@@ -4521,7 +4521,7 @@
           <a:bodyPr wrap="square" lIns="0" tIns="0" rIns="0" bIns="0" rtlCol="0" anchor="ctr"/>
           <a:lstStyle/>
           <a:p>
-            <a:pPr algn="ctr" indent="0" marL="0">
+            <a:pPr eaLnBrk="0" algn="ctr" indent="0" marL="0">
               <a:buNone/>
             </a:pPr>
             <a:r>
@@ -4560,7 +4560,7 @@
           <a:bodyPr wrap="square" lIns="0" tIns="0" rIns="0" bIns="0" rtlCol="0" anchor="ctr"/>
           <a:lstStyle/>
           <a:p>
-            <a:pPr algn="ctr" indent="0" marL="0">
+            <a:pPr eaLnBrk="0" algn="ctr" indent="0" marL="0">
               <a:buNone/>
             </a:pPr>
             <a:r>
@@ -4607,7 +4607,7 @@
           <a:bodyPr wrap="square" lIns="0" tIns="0" rIns="0" bIns="0" rtlCol="0" anchor="ctr"/>
           <a:lstStyle/>
           <a:p>
-            <a:pPr algn="ctr" indent="0" marL="0">
+            <a:pPr eaLnBrk="0" algn="ctr" indent="0" marL="0">
               <a:buNone/>
             </a:pPr>
             <a:r>
@@ -4646,7 +4646,7 @@
           <a:bodyPr wrap="square" lIns="0" tIns="0" rIns="0" bIns="0" rtlCol="0" anchor="ctr"/>
           <a:lstStyle/>
           <a:p>
-            <a:pPr algn="ctr" indent="0" marL="0">
+            <a:pPr eaLnBrk="0" algn="ctr" indent="0" marL="0">
               <a:buNone/>
             </a:pPr>
             <a:r>
@@ -4693,7 +4693,7 @@
           <a:bodyPr wrap="square" lIns="0" tIns="0" rIns="0" bIns="0" rtlCol="0" anchor="ctr"/>
           <a:lstStyle/>
           <a:p>
-            <a:pPr algn="ctr" indent="0" marL="0">
+            <a:pPr eaLnBrk="0" algn="ctr" indent="0" marL="0">
               <a:buNone/>
             </a:pPr>
             <a:r>
@@ -4732,7 +4732,7 @@
           <a:bodyPr wrap="square" lIns="0" tIns="0" rIns="0" bIns="0" rtlCol="0" anchor="ctr"/>
           <a:lstStyle/>
           <a:p>
-            <a:pPr algn="ctr" indent="0" marL="0">
+            <a:pPr eaLnBrk="0" algn="ctr" indent="0" marL="0">
               <a:buNone/>
             </a:pPr>
             <a:r>
@@ -4779,7 +4779,7 @@
           <a:bodyPr wrap="square" lIns="0" tIns="0" rIns="0" bIns="0" rtlCol="0" anchor="ctr"/>
           <a:lstStyle/>
           <a:p>
-            <a:pPr algn="ctr" indent="0" marL="0">
+            <a:pPr eaLnBrk="0" algn="ctr" indent="0" marL="0">
               <a:buNone/>
             </a:pPr>
             <a:r>
@@ -4818,7 +4818,7 @@
           <a:bodyPr wrap="square" lIns="0" tIns="0" rIns="0" bIns="0" rtlCol="0" anchor="ctr"/>
           <a:lstStyle/>
           <a:p>
-            <a:pPr algn="ctr" indent="0" marL="0">
+            <a:pPr eaLnBrk="0" algn="ctr" indent="0" marL="0">
               <a:buNone/>
             </a:pPr>
             <a:r>
@@ -4865,7 +4865,7 @@
           <a:bodyPr wrap="square" lIns="0" tIns="0" rIns="0" bIns="0" rtlCol="0" anchor="ctr"/>
           <a:lstStyle/>
           <a:p>
-            <a:pPr algn="ctr" indent="0" marL="0">
+            <a:pPr eaLnBrk="0" algn="ctr" indent="0" marL="0">
               <a:buNone/>
             </a:pPr>
             <a:r>
@@ -4904,7 +4904,7 @@
           <a:bodyPr wrap="square" lIns="0" tIns="0" rIns="0" bIns="0" rtlCol="0" anchor="ctr"/>
           <a:lstStyle/>
           <a:p>
-            <a:pPr algn="ctr" indent="0" marL="0">
+            <a:pPr eaLnBrk="0" algn="ctr" indent="0" marL="0">
               <a:buNone/>
             </a:pPr>
             <a:r>
@@ -4951,7 +4951,7 @@
           <a:bodyPr wrap="square" lIns="0" tIns="0" rIns="0" bIns="0" rtlCol="0" anchor="ctr"/>
           <a:lstStyle/>
           <a:p>
-            <a:pPr algn="ctr" indent="0" marL="0">
+            <a:pPr eaLnBrk="0" algn="ctr" indent="0" marL="0">
               <a:buNone/>
             </a:pPr>
             <a:r>
@@ -4990,7 +4990,7 @@
           <a:bodyPr wrap="square" lIns="0" tIns="0" rIns="0" bIns="0" rtlCol="0" anchor="ctr"/>
           <a:lstStyle/>
           <a:p>
-            <a:pPr algn="ctr" indent="0" marL="0">
+            <a:pPr eaLnBrk="0" algn="ctr" indent="0" marL="0">
               <a:buNone/>
             </a:pPr>
             <a:r>
@@ -5037,7 +5037,7 @@
           <a:bodyPr wrap="square" lIns="0" tIns="0" rIns="0" bIns="0" rtlCol="0" anchor="ctr"/>
           <a:lstStyle/>
           <a:p>
-            <a:pPr algn="ctr" indent="0" marL="0">
+            <a:pPr eaLnBrk="0" algn="ctr" indent="0" marL="0">
               <a:buNone/>
             </a:pPr>
             <a:r>
@@ -5076,7 +5076,7 @@
           <a:bodyPr wrap="square" lIns="0" tIns="0" rIns="0" bIns="0" rtlCol="0" anchor="ctr"/>
           <a:lstStyle/>
           <a:p>
-            <a:pPr algn="ctr" indent="0" marL="0">
+            <a:pPr eaLnBrk="0" algn="ctr" indent="0" marL="0">
               <a:buNone/>
             </a:pPr>
             <a:r>
@@ -5123,7 +5123,7 @@
           <a:bodyPr wrap="square" lIns="0" tIns="0" rIns="0" bIns="0" rtlCol="0" anchor="ctr"/>
           <a:lstStyle/>
           <a:p>
-            <a:pPr algn="ctr" indent="0" marL="0">
+            <a:pPr eaLnBrk="0" algn="ctr" indent="0" marL="0">
               <a:buNone/>
             </a:pPr>
             <a:r>
@@ -5162,7 +5162,7 @@
           <a:bodyPr wrap="square" lIns="0" tIns="0" rIns="0" bIns="0" rtlCol="0" anchor="ctr"/>
           <a:lstStyle/>
           <a:p>
-            <a:pPr algn="ctr" indent="0" marL="0">
+            <a:pPr eaLnBrk="0" algn="ctr" indent="0" marL="0">
               <a:buNone/>
             </a:pPr>
             <a:r>
@@ -5219,7 +5219,7 @@
             </a:lvl1pPr>
           </a:lstStyle>
           <a:p>
-            <a:pPr algn="r"/>
+            <a:pPr eaLnBrk="0" algn="r"/>
             <a:fld id="{F7021451-1387-4CA6-816F-3879F97B5CBC}" type="slidenum">
               <a:rPr b="0" lang="en-US"/>
               <a:t>12</a:t>
@@ -5276,7 +5276,7 @@
           <a:bodyPr wrap="square" lIns="0" tIns="0" rIns="0" bIns="0" rtlCol="0" anchor="ctr"/>
           <a:lstStyle/>
           <a:p>
-            <a:pPr algn="l" indent="0" marL="0">
+            <a:pPr eaLnBrk="0" algn="l" indent="0" marL="0">
               <a:buNone/>
             </a:pPr>
             <a:r>
@@ -5323,7 +5323,7 @@
           <a:bodyPr wrap="square" lIns="0" tIns="0" rIns="0" bIns="0" rtlCol="0" anchor="ctr"/>
           <a:lstStyle/>
           <a:p>
-            <a:pPr algn="ctr" indent="0" marL="0">
+            <a:pPr eaLnBrk="0" algn="ctr" indent="0" marL="0">
               <a:buNone/>
             </a:pPr>
             <a:r>
@@ -5362,7 +5362,7 @@
           <a:bodyPr wrap="square" lIns="0" tIns="0" rIns="0" bIns="0" rtlCol="0" anchor="ctr"/>
           <a:lstStyle/>
           <a:p>
-            <a:pPr algn="l" indent="0" marL="0">
+            <a:pPr eaLnBrk="0" algn="l" indent="0" marL="0">
               <a:buNone/>
             </a:pPr>
             <a:r>
@@ -5409,7 +5409,7 @@
           <a:bodyPr wrap="square" lIns="0" tIns="0" rIns="0" bIns="0" rtlCol="0" anchor="ctr"/>
           <a:lstStyle/>
           <a:p>
-            <a:pPr algn="ctr" indent="0" marL="0">
+            <a:pPr eaLnBrk="0" algn="ctr" indent="0" marL="0">
               <a:buNone/>
             </a:pPr>
             <a:r>
@@ -5448,7 +5448,7 @@
           <a:bodyPr wrap="square" lIns="0" tIns="0" rIns="0" bIns="0" rtlCol="0" anchor="ctr"/>
           <a:lstStyle/>
           <a:p>
-            <a:pPr algn="l" indent="0" marL="0">
+            <a:pPr eaLnBrk="0" algn="l" indent="0" marL="0">
               <a:buNone/>
             </a:pPr>
             <a:r>
@@ -5505,7 +5505,7 @@
             </a:lvl1pPr>
           </a:lstStyle>
           <a:p>
-            <a:pPr algn="r"/>
+            <a:pPr eaLnBrk="0" algn="r"/>
             <a:fld id="{F7021451-1387-4CA6-816F-3879F97B5CBC}" type="slidenum">
               <a:rPr b="0" lang="en-US"/>
               <a:t>2</a:t>
@@ -5562,7 +5562,7 @@
           <a:bodyPr wrap="square" lIns="0" tIns="0" rIns="0" bIns="0" rtlCol="0" anchor="ctr"/>
           <a:lstStyle/>
           <a:p>
-            <a:pPr algn="l" indent="0" marL="0">
+            <a:pPr eaLnBrk="0" algn="l" indent="0" marL="0">
               <a:buNone/>
             </a:pPr>
             <a:r>
@@ -5601,7 +5601,7 @@
           <a:bodyPr wrap="square" lIns="0" tIns="0" rIns="0" bIns="0" rtlCol="0" anchor="ctr"/>
           <a:lstStyle/>
           <a:p>
-            <a:pPr algn="l" indent="0" marL="0">
+            <a:pPr eaLnBrk="0" algn="l" indent="0" marL="0">
               <a:buNone/>
             </a:pPr>
             <a:r>
@@ -5667,7 +5667,7 @@
           <a:bodyPr wrap="square" lIns="0" tIns="0" rIns="0" bIns="0" rtlCol="0" anchor="ctr"/>
           <a:lstStyle/>
           <a:p>
-            <a:pPr indent="0" marL="0">
+            <a:pPr eaLnBrk="0" indent="0" marL="0">
               <a:spcAft>
                 <a:spcPts val="600"/>
               </a:spcAft>
@@ -5687,7 +5687,7 @@
             <a:endParaRPr lang="ko-KR" sz="3000" dirty="0"/>
           </a:p>
           <a:p>
-            <a:pPr indent="0" marL="0">
+            <a:pPr eaLnBrk="0" indent="0" marL="0">
               <a:spcAft>
                 <a:spcPts val="600"/>
               </a:spcAft>
@@ -5756,7 +5756,7 @@
           <a:bodyPr wrap="square" lIns="0" tIns="0" rIns="0" bIns="0" rtlCol="0" anchor="ctr"/>
           <a:lstStyle/>
           <a:p>
-            <a:pPr indent="0" marL="0">
+            <a:pPr eaLnBrk="0" indent="0" marL="0">
               <a:spcAft>
                 <a:spcPts val="600"/>
               </a:spcAft>
@@ -5776,7 +5776,7 @@
             <a:endParaRPr lang="ko-KR" sz="3000" dirty="0"/>
           </a:p>
           <a:p>
-            <a:pPr indent="0" marL="0">
+            <a:pPr eaLnBrk="0" indent="0" marL="0">
               <a:spcAft>
                 <a:spcPts val="600"/>
               </a:spcAft>
@@ -5826,7 +5826,7 @@
           <a:bodyPr wrap="square" lIns="76200" tIns="50800" rIns="76200" bIns="50800" rtlCol="0" anchor="ctr"/>
           <a:lstStyle/>
           <a:p>
-            <a:pPr algn="ctr" indent="0" marL="0">
+            <a:pPr eaLnBrk="0" algn="ctr" indent="0" marL="0">
               <a:buNone/>
             </a:pPr>
             <a:r>
@@ -5873,7 +5873,7 @@
           <a:bodyPr wrap="square" lIns="76200" tIns="50800" rIns="76200" bIns="50800" rtlCol="0" anchor="ctr"/>
           <a:lstStyle/>
           <a:p>
-            <a:pPr algn="ctr" indent="0" marL="0">
+            <a:pPr eaLnBrk="0" algn="ctr" indent="0" marL="0">
               <a:buNone/>
             </a:pPr>
             <a:r>
@@ -5920,7 +5920,7 @@
           <a:bodyPr wrap="square" lIns="76200" tIns="50800" rIns="76200" bIns="50800" rtlCol="0" anchor="ctr"/>
           <a:lstStyle/>
           <a:p>
-            <a:pPr algn="ctr" indent="0" marL="0">
+            <a:pPr eaLnBrk="0" algn="ctr" indent="0" marL="0">
               <a:buNone/>
             </a:pPr>
             <a:r>
@@ -5967,7 +5967,7 @@
           <a:bodyPr wrap="square" lIns="76200" tIns="50800" rIns="76200" bIns="50800" rtlCol="0" anchor="ctr"/>
           <a:lstStyle/>
           <a:p>
-            <a:pPr algn="ctr" indent="0" marL="0">
+            <a:pPr eaLnBrk="0" algn="ctr" indent="0" marL="0">
               <a:buNone/>
             </a:pPr>
             <a:r>
@@ -5984,7 +5984,7 @@
             <a:endParaRPr lang="ko-KR" sz="3400" dirty="0"/>
           </a:p>
           <a:p>
-            <a:pPr algn="ctr" indent="0" marL="0">
+            <a:pPr eaLnBrk="0" algn="ctr" indent="0" marL="0">
               <a:buNone/>
             </a:pPr>
             <a:r>
@@ -6041,7 +6041,7 @@
             </a:lvl1pPr>
           </a:lstStyle>
           <a:p>
-            <a:pPr algn="r"/>
+            <a:pPr eaLnBrk="0" algn="r"/>
             <a:fld id="{F7021451-1387-4CA6-816F-3879F97B5CBC}" type="slidenum">
               <a:rPr b="0" lang="en-US"/>
               <a:t>3</a:t>
@@ -6098,7 +6098,7 @@
           <a:bodyPr wrap="square" lIns="0" tIns="0" rIns="0" bIns="0" rtlCol="0" anchor="ctr"/>
           <a:lstStyle/>
           <a:p>
-            <a:pPr algn="l" indent="0" marL="0">
+            <a:pPr eaLnBrk="0" algn="l" indent="0" marL="0">
               <a:buNone/>
             </a:pPr>
             <a:r>
@@ -6137,7 +6137,7 @@
           <a:bodyPr wrap="square" lIns="0" tIns="0" rIns="0" bIns="0" rtlCol="0" anchor="ctr"/>
           <a:lstStyle/>
           <a:p>
-            <a:pPr algn="l" indent="0" marL="0">
+            <a:pPr eaLnBrk="0" algn="l" indent="0" marL="0">
               <a:buNone/>
             </a:pPr>
             <a:r>
@@ -6182,7 +6182,7 @@
           <a:bodyPr wrap="square" lIns="0" tIns="0" rIns="0" bIns="0" rtlCol="0" anchor="ctr"/>
           <a:lstStyle/>
           <a:p>
-            <a:pPr algn="ctr" indent="0" marL="0">
+            <a:pPr eaLnBrk="0" algn="ctr" indent="0" marL="0">
               <a:buNone/>
             </a:pPr>
             <a:r>
@@ -6221,7 +6221,7 @@
           <a:bodyPr wrap="square" lIns="0" tIns="0" rIns="0" bIns="0" rtlCol="0" anchor="t"/>
           <a:lstStyle/>
           <a:p>
-            <a:pPr algn="l" indent="0" marL="0">
+            <a:pPr eaLnBrk="0" algn="l" indent="0" marL="0">
               <a:buNone/>
             </a:pPr>
             <a:r>
@@ -6266,7 +6266,7 @@
           <a:bodyPr wrap="square" lIns="0" tIns="0" rIns="0" bIns="0" rtlCol="0" anchor="ctr"/>
           <a:lstStyle/>
           <a:p>
-            <a:pPr algn="ctr" indent="0" marL="0">
+            <a:pPr eaLnBrk="0" algn="ctr" indent="0" marL="0">
               <a:buNone/>
             </a:pPr>
             <a:r>
@@ -6305,7 +6305,7 @@
           <a:bodyPr wrap="square" lIns="0" tIns="0" rIns="0" bIns="0" rtlCol="0" anchor="t"/>
           <a:lstStyle/>
           <a:p>
-            <a:pPr algn="l" indent="0" marL="0">
+            <a:pPr eaLnBrk="0" algn="l" indent="0" marL="0">
               <a:buNone/>
             </a:pPr>
             <a:r>
@@ -6350,7 +6350,7 @@
           <a:bodyPr wrap="square" lIns="0" tIns="0" rIns="0" bIns="0" rtlCol="0" anchor="ctr"/>
           <a:lstStyle/>
           <a:p>
-            <a:pPr algn="ctr" indent="0" marL="0">
+            <a:pPr eaLnBrk="0" algn="ctr" indent="0" marL="0">
               <a:buNone/>
             </a:pPr>
             <a:r>
@@ -6389,7 +6389,7 @@
           <a:bodyPr wrap="square" lIns="0" tIns="0" rIns="0" bIns="0" rtlCol="0" anchor="t"/>
           <a:lstStyle/>
           <a:p>
-            <a:pPr algn="l" indent="0" marL="0">
+            <a:pPr eaLnBrk="0" algn="l" indent="0" marL="0">
               <a:buNone/>
             </a:pPr>
             <a:r>
@@ -6446,7 +6446,7 @@
             </a:lvl1pPr>
           </a:lstStyle>
           <a:p>
-            <a:pPr algn="r"/>
+            <a:pPr eaLnBrk="0" algn="r"/>
             <a:fld id="{F7021451-1387-4CA6-816F-3879F97B5CBC}" type="slidenum">
               <a:rPr b="0" lang="en-US"/>
               <a:t>4</a:t>
@@ -6503,7 +6503,7 @@
           <a:bodyPr wrap="square" lIns="0" tIns="0" rIns="0" bIns="0" rtlCol="0" anchor="ctr"/>
           <a:lstStyle/>
           <a:p>
-            <a:pPr algn="l" indent="0" marL="0">
+            <a:pPr eaLnBrk="0" algn="l" indent="0" marL="0">
               <a:buNone/>
             </a:pPr>
             <a:r>
@@ -6542,7 +6542,7 @@
           <a:bodyPr wrap="square" lIns="0" tIns="0" rIns="0" bIns="0" rtlCol="0" anchor="ctr"/>
           <a:lstStyle/>
           <a:p>
-            <a:pPr algn="l" indent="0" marL="0">
+            <a:pPr eaLnBrk="0" algn="l" indent="0" marL="0">
               <a:buNone/>
             </a:pPr>
             <a:r>
@@ -6608,7 +6608,7 @@
           <a:bodyPr wrap="square" lIns="0" tIns="0" rIns="0" bIns="0" rtlCol="0" anchor="ctr"/>
           <a:lstStyle/>
           <a:p>
-            <a:pPr indent="0" marL="0">
+            <a:pPr eaLnBrk="0" indent="0" marL="0">
               <a:spcAft>
                 <a:spcPts val="600"/>
               </a:spcAft>
@@ -6658,7 +6658,7 @@
           <a:bodyPr wrap="square" lIns="0" tIns="0" rIns="0" bIns="0" rtlCol="0" anchor="ctr"/>
           <a:lstStyle/>
           <a:p>
-            <a:pPr algn="ctr" indent="0" marL="0">
+            <a:pPr eaLnBrk="0" algn="ctr" indent="0" marL="0">
               <a:buNone/>
             </a:pPr>
             <a:r>
@@ -6697,7 +6697,7 @@
           <a:bodyPr wrap="square" lIns="0" tIns="0" rIns="0" bIns="0" rtlCol="0" anchor="ctr"/>
           <a:lstStyle/>
           <a:p>
-            <a:pPr algn="l" indent="0" marL="0">
+            <a:pPr eaLnBrk="0" algn="l" indent="0" marL="0">
               <a:buNone/>
             </a:pPr>
             <a:r>
@@ -6744,7 +6744,7 @@
           <a:bodyPr wrap="square" lIns="0" tIns="0" rIns="0" bIns="0" rtlCol="0" anchor="ctr"/>
           <a:lstStyle/>
           <a:p>
-            <a:pPr algn="ctr" indent="0" marL="0">
+            <a:pPr eaLnBrk="0" algn="ctr" indent="0" marL="0">
               <a:buNone/>
             </a:pPr>
             <a:r>
@@ -6783,7 +6783,7 @@
           <a:bodyPr wrap="square" lIns="0" tIns="0" rIns="0" bIns="0" rtlCol="0" anchor="ctr"/>
           <a:lstStyle/>
           <a:p>
-            <a:pPr algn="l" indent="0" marL="0">
+            <a:pPr eaLnBrk="0" algn="l" indent="0" marL="0">
               <a:buNone/>
             </a:pPr>
             <a:r>
@@ -6830,7 +6830,7 @@
           <a:bodyPr wrap="square" lIns="0" tIns="0" rIns="0" bIns="0" rtlCol="0" anchor="ctr"/>
           <a:lstStyle/>
           <a:p>
-            <a:pPr algn="ctr" indent="0" marL="0">
+            <a:pPr eaLnBrk="0" algn="ctr" indent="0" marL="0">
               <a:buNone/>
             </a:pPr>
             <a:r>
@@ -6869,7 +6869,7 @@
           <a:bodyPr wrap="square" lIns="0" tIns="0" rIns="0" bIns="0" rtlCol="0" anchor="ctr"/>
           <a:lstStyle/>
           <a:p>
-            <a:pPr algn="l" indent="0" marL="0">
+            <a:pPr eaLnBrk="0" algn="l" indent="0" marL="0">
               <a:buNone/>
             </a:pPr>
             <a:r>
@@ -6916,7 +6916,7 @@
           <a:bodyPr wrap="square" lIns="0" tIns="0" rIns="0" bIns="0" rtlCol="0" anchor="ctr"/>
           <a:lstStyle/>
           <a:p>
-            <a:pPr algn="ctr" indent="0" marL="0">
+            <a:pPr eaLnBrk="0" algn="ctr" indent="0" marL="0">
               <a:buNone/>
             </a:pPr>
             <a:r>
@@ -6955,7 +6955,7 @@
           <a:bodyPr wrap="square" lIns="0" tIns="0" rIns="0" bIns="0" rtlCol="0" anchor="ctr"/>
           <a:lstStyle/>
           <a:p>
-            <a:pPr algn="l" indent="0" marL="0">
+            <a:pPr eaLnBrk="0" algn="l" indent="0" marL="0">
               <a:buNone/>
             </a:pPr>
             <a:r>
@@ -7012,7 +7012,7 @@
             </a:lvl1pPr>
           </a:lstStyle>
           <a:p>
-            <a:pPr algn="r"/>
+            <a:pPr eaLnBrk="0" algn="r"/>
             <a:fld id="{F7021451-1387-4CA6-816F-3879F97B5CBC}" type="slidenum">
               <a:rPr b="0" lang="en-US"/>
               <a:t>5</a:t>
@@ -7069,7 +7069,7 @@
           <a:bodyPr wrap="square" lIns="0" tIns="0" rIns="0" bIns="0" rtlCol="0" anchor="ctr"/>
           <a:lstStyle/>
           <a:p>
-            <a:pPr algn="l" indent="0" marL="0">
+            <a:pPr eaLnBrk="0" algn="l" indent="0" marL="0">
               <a:buNone/>
             </a:pPr>
             <a:r>
@@ -7108,7 +7108,7 @@
           <a:bodyPr wrap="square" lIns="0" tIns="0" rIns="0" bIns="0" rtlCol="0" anchor="ctr"/>
           <a:lstStyle/>
           <a:p>
-            <a:pPr algn="l" indent="0" marL="0">
+            <a:pPr eaLnBrk="0" algn="l" indent="0" marL="0">
               <a:buNone/>
             </a:pPr>
             <a:r>
@@ -7174,7 +7174,7 @@
           <a:bodyPr wrap="square" lIns="0" tIns="0" rIns="0" bIns="0" rtlCol="0" anchor="ctr"/>
           <a:lstStyle/>
           <a:p>
-            <a:pPr indent="0" marL="0">
+            <a:pPr eaLnBrk="0" indent="0" marL="0">
               <a:spcAft>
                 <a:spcPts val="600"/>
               </a:spcAft>
@@ -7224,7 +7224,7 @@
           <a:bodyPr wrap="square" lIns="0" tIns="0" rIns="0" bIns="0" rtlCol="0" anchor="ctr"/>
           <a:lstStyle/>
           <a:p>
-            <a:pPr algn="ctr" indent="0" marL="0">
+            <a:pPr eaLnBrk="0" algn="ctr" indent="0" marL="0">
               <a:buNone/>
             </a:pPr>
             <a:r>
@@ -7271,7 +7271,7 @@
           <a:bodyPr wrap="square" lIns="0" tIns="0" rIns="0" bIns="0" rtlCol="0" anchor="ctr"/>
           <a:lstStyle/>
           <a:p>
-            <a:pPr algn="ctr" indent="0" marL="0">
+            <a:pPr eaLnBrk="0" algn="ctr" indent="0" marL="0">
               <a:buNone/>
             </a:pPr>
             <a:r>
@@ -7318,7 +7318,7 @@
           <a:bodyPr wrap="square" lIns="0" tIns="0" rIns="0" bIns="0" rtlCol="0" anchor="ctr"/>
           <a:lstStyle/>
           <a:p>
-            <a:pPr algn="ctr" indent="0" marL="0">
+            <a:pPr eaLnBrk="0" algn="ctr" indent="0" marL="0">
               <a:buNone/>
             </a:pPr>
             <a:r>
@@ -7365,7 +7365,7 @@
           <a:bodyPr wrap="square" lIns="0" tIns="0" rIns="0" bIns="0" rtlCol="0" anchor="ctr"/>
           <a:lstStyle/>
           <a:p>
-            <a:pPr algn="ctr" indent="0" marL="0">
+            <a:pPr eaLnBrk="0" algn="ctr" indent="0" marL="0">
               <a:buNone/>
             </a:pPr>
             <a:r>
@@ -7412,7 +7412,7 @@
           <a:bodyPr wrap="square" lIns="0" tIns="0" rIns="0" bIns="0" rtlCol="0" anchor="ctr"/>
           <a:lstStyle/>
           <a:p>
-            <a:pPr algn="ctr" indent="0" marL="0">
+            <a:pPr eaLnBrk="0" algn="ctr" indent="0" marL="0">
               <a:buNone/>
             </a:pPr>
             <a:r>
@@ -7459,7 +7459,7 @@
           <a:bodyPr wrap="square" lIns="0" tIns="0" rIns="0" bIns="0" rtlCol="0" anchor="ctr"/>
           <a:lstStyle/>
           <a:p>
-            <a:pPr algn="ctr" indent="0" marL="0">
+            <a:pPr eaLnBrk="0" algn="ctr" indent="0" marL="0">
               <a:buNone/>
             </a:pPr>
             <a:r>
@@ -7506,7 +7506,7 @@
           <a:bodyPr wrap="square" lIns="0" tIns="0" rIns="0" bIns="0" rtlCol="0" anchor="ctr"/>
           <a:lstStyle/>
           <a:p>
-            <a:pPr algn="ctr" indent="0" marL="0">
+            <a:pPr eaLnBrk="0" algn="ctr" indent="0" marL="0">
               <a:buNone/>
             </a:pPr>
             <a:r>
@@ -7553,7 +7553,7 @@
           <a:bodyPr wrap="square" lIns="0" tIns="0" rIns="0" bIns="0" rtlCol="0" anchor="ctr"/>
           <a:lstStyle/>
           <a:p>
-            <a:pPr algn="ctr" indent="0" marL="0">
+            <a:pPr eaLnBrk="0" algn="ctr" indent="0" marL="0">
               <a:buNone/>
             </a:pPr>
             <a:r>
@@ -7600,7 +7600,7 @@
           <a:bodyPr wrap="square" lIns="0" tIns="0" rIns="0" bIns="0" rtlCol="0" anchor="ctr"/>
           <a:lstStyle/>
           <a:p>
-            <a:pPr algn="ctr" indent="0" marL="0">
+            <a:pPr eaLnBrk="0" algn="ctr" indent="0" marL="0">
               <a:buNone/>
             </a:pPr>
             <a:r>
@@ -7647,7 +7647,7 @@
           <a:bodyPr wrap="square" lIns="0" tIns="0" rIns="0" bIns="0" rtlCol="0" anchor="ctr"/>
           <a:lstStyle/>
           <a:p>
-            <a:pPr algn="ctr" indent="0" marL="0">
+            <a:pPr eaLnBrk="0" algn="ctr" indent="0" marL="0">
               <a:buNone/>
             </a:pPr>
             <a:r>
@@ -7694,7 +7694,7 @@
           <a:bodyPr wrap="square" lIns="0" tIns="0" rIns="0" bIns="0" rtlCol="0" anchor="ctr"/>
           <a:lstStyle/>
           <a:p>
-            <a:pPr algn="ctr" indent="0" marL="0">
+            <a:pPr eaLnBrk="0" algn="ctr" indent="0" marL="0">
               <a:buNone/>
             </a:pPr>
             <a:r>
@@ -7741,7 +7741,7 @@
           <a:bodyPr wrap="square" lIns="0" tIns="0" rIns="0" bIns="0" rtlCol="0" anchor="ctr"/>
           <a:lstStyle/>
           <a:p>
-            <a:pPr algn="ctr" indent="0" marL="0">
+            <a:pPr eaLnBrk="0" algn="ctr" indent="0" marL="0">
               <a:buNone/>
             </a:pPr>
             <a:r>
@@ -7788,7 +7788,7 @@
           <a:bodyPr wrap="square" lIns="0" tIns="0" rIns="0" bIns="0" rtlCol="0" anchor="ctr"/>
           <a:lstStyle/>
           <a:p>
-            <a:pPr algn="ctr" indent="0" marL="0">
+            <a:pPr eaLnBrk="0" algn="ctr" indent="0" marL="0">
               <a:buNone/>
             </a:pPr>
             <a:r>
@@ -7835,7 +7835,7 @@
           <a:bodyPr wrap="square" lIns="0" tIns="0" rIns="0" bIns="0" rtlCol="0" anchor="ctr"/>
           <a:lstStyle/>
           <a:p>
-            <a:pPr algn="ctr" indent="0" marL="0">
+            <a:pPr eaLnBrk="0" algn="ctr" indent="0" marL="0">
               <a:buNone/>
             </a:pPr>
             <a:r>
@@ -7882,7 +7882,7 @@
           <a:bodyPr wrap="square" lIns="0" tIns="0" rIns="0" bIns="0" rtlCol="0" anchor="ctr"/>
           <a:lstStyle/>
           <a:p>
-            <a:pPr algn="ctr" indent="0" marL="0">
+            <a:pPr eaLnBrk="0" algn="ctr" indent="0" marL="0">
               <a:buNone/>
             </a:pPr>
             <a:r>
@@ -7929,7 +7929,7 @@
           <a:bodyPr wrap="square" lIns="0" tIns="0" rIns="0" bIns="0" rtlCol="0" anchor="ctr"/>
           <a:lstStyle/>
           <a:p>
-            <a:pPr algn="ctr" indent="0" marL="0">
+            <a:pPr eaLnBrk="0" algn="ctr" indent="0" marL="0">
               <a:buNone/>
             </a:pPr>
             <a:r>
@@ -7976,7 +7976,7 @@
           <a:bodyPr wrap="square" lIns="0" tIns="0" rIns="0" bIns="0" rtlCol="0" anchor="ctr"/>
           <a:lstStyle/>
           <a:p>
-            <a:pPr algn="ctr" indent="0" marL="0">
+            <a:pPr eaLnBrk="0" algn="ctr" indent="0" marL="0">
               <a:buNone/>
             </a:pPr>
             <a:r>
@@ -8023,7 +8023,7 @@
           <a:bodyPr wrap="square" lIns="0" tIns="0" rIns="0" bIns="0" rtlCol="0" anchor="ctr"/>
           <a:lstStyle/>
           <a:p>
-            <a:pPr algn="ctr" indent="0" marL="0">
+            <a:pPr eaLnBrk="0" algn="ctr" indent="0" marL="0">
               <a:buNone/>
             </a:pPr>
             <a:r>
@@ -8070,7 +8070,7 @@
           <a:bodyPr wrap="square" lIns="0" tIns="0" rIns="0" bIns="0" rtlCol="0" anchor="ctr"/>
           <a:lstStyle/>
           <a:p>
-            <a:pPr algn="ctr" indent="0" marL="0">
+            <a:pPr eaLnBrk="0" algn="ctr" indent="0" marL="0">
               <a:buNone/>
             </a:pPr>
             <a:r>
@@ -8127,7 +8127,7 @@
             </a:lvl1pPr>
           </a:lstStyle>
           <a:p>
-            <a:pPr algn="r"/>
+            <a:pPr eaLnBrk="0" algn="r"/>
             <a:fld id="{F7021451-1387-4CA6-816F-3879F97B5CBC}" type="slidenum">
               <a:rPr b="0" lang="en-US"/>
               <a:t>6</a:t>
@@ -8184,7 +8184,7 @@
           <a:bodyPr wrap="square" lIns="0" tIns="0" rIns="0" bIns="0" rtlCol="0" anchor="ctr"/>
           <a:lstStyle/>
           <a:p>
-            <a:pPr algn="l" indent="0" marL="0">
+            <a:pPr eaLnBrk="0" algn="l" indent="0" marL="0">
               <a:buNone/>
             </a:pPr>
             <a:r>
@@ -8223,7 +8223,7 @@
           <a:bodyPr wrap="square" lIns="0" tIns="0" rIns="0" bIns="0" rtlCol="0" anchor="ctr"/>
           <a:lstStyle/>
           <a:p>
-            <a:pPr algn="l" indent="0" marL="0">
+            <a:pPr eaLnBrk="0" algn="l" indent="0" marL="0">
               <a:buNone/>
             </a:pPr>
             <a:r>
@@ -8289,7 +8289,7 @@
           <a:bodyPr wrap="square" lIns="0" tIns="0" rIns="0" bIns="0" rtlCol="0" anchor="ctr"/>
           <a:lstStyle/>
           <a:p>
-            <a:pPr indent="0" marL="0">
+            <a:pPr eaLnBrk="0" indent="0" marL="0">
               <a:spcAft>
                 <a:spcPts val="600"/>
               </a:spcAft>
@@ -8309,7 +8309,7 @@
             <a:endParaRPr lang="ko-KR" sz="3000" dirty="0"/>
           </a:p>
           <a:p>
-            <a:pPr indent="0" marL="0">
+            <a:pPr eaLnBrk="0" indent="0" marL="0">
               <a:spcAft>
                 <a:spcPts val="600"/>
               </a:spcAft>
@@ -8378,7 +8378,7 @@
           <a:bodyPr wrap="square" lIns="0" tIns="0" rIns="0" bIns="0" rtlCol="0" anchor="ctr"/>
           <a:lstStyle/>
           <a:p>
-            <a:pPr indent="0" marL="0">
+            <a:pPr eaLnBrk="0" indent="0" marL="0">
               <a:spcAft>
                 <a:spcPts val="600"/>
               </a:spcAft>
@@ -8398,7 +8398,7 @@
             <a:endParaRPr lang="ko-KR" sz="3000" dirty="0"/>
           </a:p>
           <a:p>
-            <a:pPr indent="0" marL="0">
+            <a:pPr eaLnBrk="0" indent="0" marL="0">
               <a:spcAft>
                 <a:spcPts val="600"/>
               </a:spcAft>
@@ -8418,7 +8418,7 @@
             <a:endParaRPr lang="ko-KR" sz="3000" dirty="0"/>
           </a:p>
           <a:p>
-            <a:pPr indent="0" marL="0">
+            <a:pPr eaLnBrk="0" indent="0" marL="0">
               <a:spcAft>
                 <a:spcPts val="600"/>
               </a:spcAft>
@@ -8468,7 +8468,7 @@
           <a:bodyPr wrap="square" lIns="0" tIns="0" rIns="0" bIns="0" rtlCol="0" anchor="ctr"/>
           <a:lstStyle/>
           <a:p>
-            <a:pPr algn="ctr" indent="0" marL="0">
+            <a:pPr eaLnBrk="0" algn="ctr" indent="0" marL="0">
               <a:buNone/>
             </a:pPr>
             <a:r>
@@ -8515,7 +8515,7 @@
           <a:bodyPr wrap="square" lIns="0" tIns="0" rIns="0" bIns="0" rtlCol="0" anchor="ctr"/>
           <a:lstStyle/>
           <a:p>
-            <a:pPr algn="ctr" indent="0" marL="0">
+            <a:pPr eaLnBrk="0" algn="ctr" indent="0" marL="0">
               <a:buNone/>
             </a:pPr>
             <a:r>
@@ -8562,7 +8562,7 @@
           <a:bodyPr wrap="square" lIns="0" tIns="0" rIns="0" bIns="0" rtlCol="0" anchor="ctr"/>
           <a:lstStyle/>
           <a:p>
-            <a:pPr algn="ctr" indent="0" marL="0">
+            <a:pPr eaLnBrk="0" algn="ctr" indent="0" marL="0">
               <a:buNone/>
             </a:pPr>
             <a:r>
@@ -8609,7 +8609,7 @@
           <a:bodyPr wrap="square" lIns="0" tIns="0" rIns="0" bIns="0" rtlCol="0" anchor="ctr"/>
           <a:lstStyle/>
           <a:p>
-            <a:pPr algn="ctr" indent="0" marL="0">
+            <a:pPr eaLnBrk="0" algn="ctr" indent="0" marL="0">
               <a:buNone/>
             </a:pPr>
             <a:r>
@@ -8656,7 +8656,7 @@
           <a:bodyPr wrap="square" lIns="0" tIns="0" rIns="0" bIns="0" rtlCol="0" anchor="ctr"/>
           <a:lstStyle/>
           <a:p>
-            <a:pPr algn="ctr" indent="0" marL="0">
+            <a:pPr eaLnBrk="0" algn="ctr" indent="0" marL="0">
               <a:buNone/>
             </a:pPr>
             <a:r>
@@ -8703,7 +8703,7 @@
           <a:bodyPr wrap="square" lIns="0" tIns="0" rIns="0" bIns="0" rtlCol="0" anchor="ctr"/>
           <a:lstStyle/>
           <a:p>
-            <a:pPr algn="ctr" indent="0" marL="0">
+            <a:pPr eaLnBrk="0" algn="ctr" indent="0" marL="0">
               <a:buNone/>
             </a:pPr>
             <a:r>
@@ -8750,7 +8750,7 @@
           <a:bodyPr wrap="square" lIns="0" tIns="0" rIns="0" bIns="0" rtlCol="0" anchor="ctr"/>
           <a:lstStyle/>
           <a:p>
-            <a:pPr algn="ctr" indent="0" marL="0">
+            <a:pPr eaLnBrk="0" algn="ctr" indent="0" marL="0">
               <a:buNone/>
             </a:pPr>
             <a:r>
@@ -8797,7 +8797,7 @@
           <a:bodyPr wrap="square" lIns="0" tIns="0" rIns="0" bIns="0" rtlCol="0" anchor="ctr"/>
           <a:lstStyle/>
           <a:p>
-            <a:pPr algn="ctr" indent="0" marL="0">
+            <a:pPr eaLnBrk="0" algn="ctr" indent="0" marL="0">
               <a:buNone/>
             </a:pPr>
             <a:r>
@@ -8844,7 +8844,7 @@
           <a:bodyPr wrap="square" lIns="0" tIns="0" rIns="0" bIns="0" rtlCol="0" anchor="ctr"/>
           <a:lstStyle/>
           <a:p>
-            <a:pPr algn="ctr" indent="0" marL="0">
+            <a:pPr eaLnBrk="0" algn="ctr" indent="0" marL="0">
               <a:buNone/>
             </a:pPr>
             <a:r>
@@ -8891,7 +8891,7 @@
           <a:bodyPr wrap="square" lIns="0" tIns="0" rIns="0" bIns="0" rtlCol="0" anchor="ctr"/>
           <a:lstStyle/>
           <a:p>
-            <a:pPr algn="ctr" indent="0" marL="0">
+            <a:pPr eaLnBrk="0" algn="ctr" indent="0" marL="0">
               <a:buNone/>
             </a:pPr>
             <a:r>
@@ -8938,7 +8938,7 @@
           <a:bodyPr wrap="square" lIns="0" tIns="0" rIns="0" bIns="0" rtlCol="0" anchor="ctr"/>
           <a:lstStyle/>
           <a:p>
-            <a:pPr algn="ctr" indent="0" marL="0">
+            <a:pPr eaLnBrk="0" algn="ctr" indent="0" marL="0">
               <a:buNone/>
             </a:pPr>
             <a:r>
@@ -8985,7 +8985,7 @@
           <a:bodyPr wrap="square" lIns="0" tIns="0" rIns="0" bIns="0" rtlCol="0" anchor="ctr"/>
           <a:lstStyle/>
           <a:p>
-            <a:pPr algn="ctr" indent="0" marL="0">
+            <a:pPr eaLnBrk="0" algn="ctr" indent="0" marL="0">
               <a:buNone/>
             </a:pPr>
             <a:r>
@@ -9032,7 +9032,7 @@
           <a:bodyPr wrap="square" lIns="0" tIns="0" rIns="0" bIns="0" rtlCol="0" anchor="ctr"/>
           <a:lstStyle/>
           <a:p>
-            <a:pPr algn="ctr" indent="0" marL="0">
+            <a:pPr eaLnBrk="0" algn="ctr" indent="0" marL="0">
               <a:buNone/>
             </a:pPr>
             <a:r>
@@ -9079,7 +9079,7 @@
           <a:bodyPr wrap="square" lIns="0" tIns="0" rIns="0" bIns="0" rtlCol="0" anchor="ctr"/>
           <a:lstStyle/>
           <a:p>
-            <a:pPr algn="ctr" indent="0" marL="0">
+            <a:pPr eaLnBrk="0" algn="ctr" indent="0" marL="0">
               <a:buNone/>
             </a:pPr>
             <a:r>
@@ -9126,7 +9126,7 @@
           <a:bodyPr wrap="square" lIns="0" tIns="0" rIns="0" bIns="0" rtlCol="0" anchor="ctr"/>
           <a:lstStyle/>
           <a:p>
-            <a:pPr algn="ctr" indent="0" marL="0">
+            <a:pPr eaLnBrk="0" algn="ctr" indent="0" marL="0">
               <a:buNone/>
             </a:pPr>
             <a:r>
@@ -9173,7 +9173,7 @@
           <a:bodyPr wrap="square" lIns="0" tIns="0" rIns="0" bIns="0" rtlCol="0" anchor="ctr"/>
           <a:lstStyle/>
           <a:p>
-            <a:pPr algn="ctr" indent="0" marL="0">
+            <a:pPr eaLnBrk="0" algn="ctr" indent="0" marL="0">
               <a:buNone/>
             </a:pPr>
             <a:r>
@@ -9220,7 +9220,7 @@
           <a:bodyPr wrap="square" lIns="0" tIns="0" rIns="0" bIns="0" rtlCol="0" anchor="ctr"/>
           <a:lstStyle/>
           <a:p>
-            <a:pPr algn="ctr" indent="0" marL="0">
+            <a:pPr eaLnBrk="0" algn="ctr" indent="0" marL="0">
               <a:buNone/>
             </a:pPr>
             <a:r>
@@ -9267,7 +9267,7 @@
           <a:bodyPr wrap="square" lIns="0" tIns="0" rIns="0" bIns="0" rtlCol="0" anchor="ctr"/>
           <a:lstStyle/>
           <a:p>
-            <a:pPr algn="ctr" indent="0" marL="0">
+            <a:pPr eaLnBrk="0" algn="ctr" indent="0" marL="0">
               <a:buNone/>
             </a:pPr>
             <a:r>
@@ -9314,7 +9314,7 @@
           <a:bodyPr wrap="square" lIns="0" tIns="0" rIns="0" bIns="0" rtlCol="0" anchor="ctr"/>
           <a:lstStyle/>
           <a:p>
-            <a:pPr algn="ctr" indent="0" marL="0">
+            <a:pPr eaLnBrk="0" algn="ctr" indent="0" marL="0">
               <a:buNone/>
             </a:pPr>
             <a:r>
@@ -9361,7 +9361,7 @@
           <a:bodyPr wrap="square" lIns="0" tIns="0" rIns="0" bIns="0" rtlCol="0" anchor="ctr"/>
           <a:lstStyle/>
           <a:p>
-            <a:pPr algn="ctr" indent="0" marL="0">
+            <a:pPr eaLnBrk="0" algn="ctr" indent="0" marL="0">
               <a:buNone/>
             </a:pPr>
             <a:r>
@@ -9408,7 +9408,7 @@
           <a:bodyPr wrap="square" lIns="0" tIns="0" rIns="0" bIns="0" rtlCol="0" anchor="ctr"/>
           <a:lstStyle/>
           <a:p>
-            <a:pPr algn="ctr" indent="0" marL="0">
+            <a:pPr eaLnBrk="0" algn="ctr" indent="0" marL="0">
               <a:buNone/>
             </a:pPr>
             <a:r>
@@ -9465,7 +9465,7 @@
             </a:lvl1pPr>
           </a:lstStyle>
           <a:p>
-            <a:pPr algn="r"/>
+            <a:pPr eaLnBrk="0" algn="r"/>
             <a:fld id="{F7021451-1387-4CA6-816F-3879F97B5CBC}" type="slidenum">
               <a:rPr b="0" lang="en-US"/>
               <a:t>7</a:t>
@@ -9522,7 +9522,7 @@
           <a:bodyPr wrap="square" lIns="0" tIns="0" rIns="0" bIns="0" rtlCol="0" anchor="ctr"/>
           <a:lstStyle/>
           <a:p>
-            <a:pPr algn="l" indent="0" marL="0">
+            <a:pPr eaLnBrk="0" algn="l" indent="0" marL="0">
               <a:buNone/>
             </a:pPr>
             <a:r>
@@ -9561,7 +9561,7 @@
           <a:bodyPr wrap="square" lIns="0" tIns="0" rIns="0" bIns="0" rtlCol="0" anchor="ctr"/>
           <a:lstStyle/>
           <a:p>
-            <a:pPr algn="l" indent="0" marL="0">
+            <a:pPr eaLnBrk="0" algn="l" indent="0" marL="0">
               <a:buNone/>
             </a:pPr>
             <a:r>
@@ -9608,7 +9608,7 @@
           <a:bodyPr wrap="square" lIns="0" tIns="0" rIns="0" bIns="0" rtlCol="0" anchor="ctr"/>
           <a:lstStyle/>
           <a:p>
-            <a:pPr algn="ctr" indent="0" marL="0">
+            <a:pPr eaLnBrk="0" algn="ctr" indent="0" marL="0">
               <a:buNone/>
             </a:pPr>
             <a:r>
@@ -9647,7 +9647,7 @@
           <a:bodyPr wrap="square" lIns="0" tIns="0" rIns="0" bIns="0" rtlCol="0" anchor="ctr"/>
           <a:lstStyle/>
           <a:p>
-            <a:pPr algn="l" indent="0" marL="0">
+            <a:pPr eaLnBrk="0" algn="l" indent="0" marL="0">
               <a:buNone/>
             </a:pPr>
             <a:r>
@@ -9694,7 +9694,7 @@
           <a:bodyPr wrap="square" lIns="0" tIns="0" rIns="0" bIns="0" rtlCol="0" anchor="ctr"/>
           <a:lstStyle/>
           <a:p>
-            <a:pPr algn="ctr" indent="0" marL="0">
+            <a:pPr eaLnBrk="0" algn="ctr" indent="0" marL="0">
               <a:buNone/>
             </a:pPr>
             <a:r>
@@ -9733,7 +9733,7 @@
           <a:bodyPr wrap="square" lIns="0" tIns="0" rIns="0" bIns="0" rtlCol="0" anchor="ctr"/>
           <a:lstStyle/>
           <a:p>
-            <a:pPr algn="l" indent="0" marL="0">
+            <a:pPr eaLnBrk="0" algn="l" indent="0" marL="0">
               <a:buNone/>
             </a:pPr>
             <a:r>
@@ -9780,7 +9780,7 @@
           <a:bodyPr wrap="square" lIns="0" tIns="0" rIns="0" bIns="0" rtlCol="0" anchor="ctr"/>
           <a:lstStyle/>
           <a:p>
-            <a:pPr algn="ctr" indent="0" marL="0">
+            <a:pPr eaLnBrk="0" algn="ctr" indent="0" marL="0">
               <a:buNone/>
             </a:pPr>
             <a:r>
@@ -9819,7 +9819,7 @@
           <a:bodyPr wrap="square" lIns="0" tIns="0" rIns="0" bIns="0" rtlCol="0" anchor="ctr"/>
           <a:lstStyle/>
           <a:p>
-            <a:pPr algn="l" indent="0" marL="0">
+            <a:pPr eaLnBrk="0" algn="l" indent="0" marL="0">
               <a:buNone/>
             </a:pPr>
             <a:r>
@@ -9876,7 +9876,7 @@
             </a:lvl1pPr>
           </a:lstStyle>
           <a:p>
-            <a:pPr algn="r"/>
+            <a:pPr eaLnBrk="0" algn="r"/>
             <a:fld id="{F7021451-1387-4CA6-816F-3879F97B5CBC}" type="slidenum">
               <a:rPr b="0" lang="en-US"/>
               <a:t>8</a:t>
@@ -9933,7 +9933,7 @@
           <a:bodyPr wrap="square" lIns="0" tIns="0" rIns="0" bIns="0" rtlCol="0" anchor="ctr"/>
           <a:lstStyle/>
           <a:p>
-            <a:pPr algn="l" indent="0" marL="0">
+            <a:pPr eaLnBrk="0" algn="l" indent="0" marL="0">
               <a:buNone/>
             </a:pPr>
             <a:r>
@@ -9972,7 +9972,7 @@
           <a:bodyPr wrap="square" lIns="0" tIns="0" rIns="0" bIns="0" rtlCol="0" anchor="ctr"/>
           <a:lstStyle/>
           <a:p>
-            <a:pPr algn="l" indent="0" marL="0">
+            <a:pPr eaLnBrk="0" algn="l" indent="0" marL="0">
               <a:buNone/>
             </a:pPr>
             <a:r>
@@ -10038,7 +10038,7 @@
           <a:bodyPr wrap="square" lIns="0" tIns="0" rIns="0" bIns="0" rtlCol="0" anchor="ctr"/>
           <a:lstStyle/>
           <a:p>
-            <a:pPr indent="0" marL="0">
+            <a:pPr eaLnBrk="0" indent="0" marL="0">
               <a:spcAft>
                 <a:spcPts val="600"/>
               </a:spcAft>
@@ -10091,7 +10091,7 @@
                     <a:bodyPr/>
                     <a:lstStyle/>
                     <a:p>
-                      <a:pPr algn="ctr" indent="0" marL="0">
+                      <a:pPr eaLnBrk="0" algn="ctr" indent="0" marL="0">
                         <a:buNone/>
                       </a:pPr>
                       <a:r>
@@ -10159,7 +10159,7 @@
                     <a:bodyPr/>
                     <a:lstStyle/>
                     <a:p>
-                      <a:pPr algn="ctr" indent="0" marL="0">
+                      <a:pPr eaLnBrk="0" algn="ctr" indent="0" marL="0">
                         <a:buNone/>
                       </a:pPr>
                       <a:r>
@@ -10229,7 +10229,7 @@
                     <a:bodyPr/>
                     <a:lstStyle/>
                     <a:p>
-                      <a:pPr algn="ctr" indent="0" marL="0">
+                      <a:pPr eaLnBrk="0" algn="ctr" indent="0" marL="0">
                         <a:buNone/>
                       </a:pPr>
                       <a:r>
@@ -10297,7 +10297,7 @@
                     <a:bodyPr/>
                     <a:lstStyle/>
                     <a:p>
-                      <a:pPr algn="ctr" indent="0" marL="0">
+                      <a:pPr eaLnBrk="0" algn="ctr" indent="0" marL="0">
                         <a:buNone/>
                       </a:pPr>
                       <a:r>
@@ -10367,7 +10367,7 @@
                     <a:bodyPr/>
                     <a:lstStyle/>
                     <a:p>
-                      <a:pPr algn="ctr" indent="0" marL="0">
+                      <a:pPr eaLnBrk="0" algn="ctr" indent="0" marL="0">
                         <a:buNone/>
                       </a:pPr>
                       <a:r>
@@ -10435,7 +10435,7 @@
                     <a:bodyPr/>
                     <a:lstStyle/>
                     <a:p>
-                      <a:pPr algn="ctr" indent="0" marL="0">
+                      <a:pPr eaLnBrk="0" algn="ctr" indent="0" marL="0">
                         <a:buNone/>
                       </a:pPr>
                       <a:r>
@@ -10505,7 +10505,7 @@
                     <a:bodyPr/>
                     <a:lstStyle/>
                     <a:p>
-                      <a:pPr algn="ctr" indent="0" marL="0">
+                      <a:pPr eaLnBrk="0" algn="ctr" indent="0" marL="0">
                         <a:buNone/>
                       </a:pPr>
                       <a:r>
@@ -10573,7 +10573,7 @@
                     <a:bodyPr/>
                     <a:lstStyle/>
                     <a:p>
-                      <a:pPr algn="ctr" indent="0" marL="0">
+                      <a:pPr eaLnBrk="0" algn="ctr" indent="0" marL="0">
                         <a:buNone/>
                       </a:pPr>
                       <a:r>
@@ -10643,7 +10643,7 @@
                     <a:bodyPr/>
                     <a:lstStyle/>
                     <a:p>
-                      <a:pPr algn="ctr" indent="0" marL="0">
+                      <a:pPr eaLnBrk="0" algn="ctr" indent="0" marL="0">
                         <a:buNone/>
                       </a:pPr>
                       <a:r>
@@ -10711,7 +10711,7 @@
                     <a:bodyPr/>
                     <a:lstStyle/>
                     <a:p>
-                      <a:pPr algn="ctr" indent="0" marL="0">
+                      <a:pPr eaLnBrk="0" algn="ctr" indent="0" marL="0">
                         <a:buNone/>
                       </a:pPr>
                       <a:r>
@@ -10818,7 +10818,7 @@
             </a:lvl1pPr>
           </a:lstStyle>
           <a:p>
-            <a:pPr algn="r"/>
+            <a:pPr eaLnBrk="0" algn="r"/>
             <a:fld id="{F7021451-1387-4CA6-816F-3879F97B5CBC}" type="slidenum">
               <a:rPr b="0" lang="en-US"/>
               <a:t>9</a:t>

--- a/dist/초3/국어/읽기와어휘/초3_국어_읽기와어휘_03_국어사전찾기_학생용.pptx
+++ b/dist/초3/국어/읽기와어휘/초3_국어_읽기와어휘_03_국어사전찾기_학생용.pptx
@@ -118,13 +118,13 @@
   <p:extLst>
     <p:ext uri="{521415D9-36F7-43E2-AB2F-B90AF26B5E84}">
       <p14:sectionLst xmlns:p14="http://schemas.microsoft.com/office/powerpoint/2010/main">
-        <p14:section name="도입" id="{21347399-d040-8d2d-c548-7add2285ec11}">
+        <p14:section name="도입" id="{0fe19757-53bc-79fe-962f-65174fe3b134}">
           <p14:sldIdLst>
             <p14:sldId id="256"/>
             <p14:sldId id="257"/>
           </p14:sldIdLst>
         </p14:section>
-        <p14:section name="개념" id="{965e5fb1-b821-22b7-41a8-d5d5ea3995c5}">
+        <p14:section name="개념" id="{7416d558-a3b9-78e0-bfeb-a947d56f5d2d}">
           <p14:sldIdLst>
             <p14:sldId id="258"/>
             <p14:sldId id="259"/>
@@ -132,30 +132,30 @@
             <p14:sldId id="262"/>
           </p14:sldIdLst>
         </p14:section>
-        <p14:section name="연습" id="{2f6a9d45-3fda-251c-0cce-39a56670e1db}">
+        <p14:section name="연습" id="{40f5bea5-0ee5-cff6-016d-277bf11ef8cc}">
           <p14:sldIdLst>
             <p14:sldId id="260"/>
             <p14:sldId id="263"/>
           </p14:sldIdLst>
         </p14:section>
-        <p14:section name="개념" id="{82fd2251-ca0c-d208-31df-4a6af8a539e8}">
+        <p14:section name="개념" id="{58531eab-b8b6-dd96-a4b4-0500ab5901aa}">
           <p14:sldIdLst/>
         </p14:section>
-        <p14:section name="연습" id="{a28f8a13-1493-666c-1459-3df3539b0421}">
+        <p14:section name="연습" id="{510eb013-e4f3-beff-fbcb-820c63335d98}">
           <p14:sldIdLst/>
         </p14:section>
-        <p14:section name="확인" id="{a0525a15-2e01-485c-8fa3-07f154859568}">
+        <p14:section name="확인" id="{aabedfa7-942d-951b-bed4-2cd2f9efa4ce}">
           <p14:sldIdLst>
             <p14:sldId id="264"/>
             <p14:sldId id="265"/>
           </p14:sldIdLst>
         </p14:section>
-        <p14:section name="정리" id="{7b0b123b-0244-e19a-4055-10cb4eecd880}">
+        <p14:section name="정리" id="{b991bd90-799d-2d5b-e363-01e23df6534e}">
           <p14:sldIdLst>
             <p14:sldId id="266"/>
           </p14:sldIdLst>
         </p14:section>
-        <p14:section name="보충" id="{f3b20a71-422e-d66f-101e-cf6ffe6daed7}">
+        <p14:section name="보충" id="{f87a2da1-b440-6306-5d1b-634cdb7a4b3d}">
           <p14:sldIdLst>
             <p14:sldId id="267"/>
           </p14:sldIdLst>
@@ -10074,7 +10074,7 @@
           </p:nvPr>
         </p:nvGraphicFramePr>
         <p:xfrm>
-          <a:off x="1293876" y="2346960"/>
+          <a:off x="1293876" y="2385060"/>
           <a:ext cx="9601200" cy="914400"/>
         </p:xfrm>
         <a:graphic>
@@ -10085,7 +10085,7 @@
                 <a:gridCol w="2880360"/>
                 <a:gridCol w="6720840"/>
               </a:tblGrid>
-              <a:tr h="487680">
+              <a:tr h="472440">
                 <a:tc>
                   <a:txBody>
                     <a:bodyPr/>
@@ -10223,7 +10223,7 @@
                   </a:tcPr>
                 </a:tc>
               </a:tr>
-              <a:tr h="487680">
+              <a:tr h="472440">
                 <a:tc>
                   <a:txBody>
                     <a:bodyPr/>
@@ -10361,7 +10361,7 @@
                   </a:tcPr>
                 </a:tc>
               </a:tr>
-              <a:tr h="487680">
+              <a:tr h="472440">
                 <a:tc>
                   <a:txBody>
                     <a:bodyPr/>
@@ -10499,7 +10499,7 @@
                   </a:tcPr>
                 </a:tc>
               </a:tr>
-              <a:tr h="487680">
+              <a:tr h="472440">
                 <a:tc>
                   <a:txBody>
                     <a:bodyPr/>
@@ -10637,7 +10637,7 @@
                   </a:tcPr>
                 </a:tc>
               </a:tr>
-              <a:tr h="487680">
+              <a:tr h="472440">
                 <a:tc>
                   <a:txBody>
                     <a:bodyPr/>
